--- a/tutor-time/the-apology/downloads/The_Apology.pptx
+++ b/tutor-time/the-apology/downloads/The_Apology.pptx
@@ -8226,7 +8226,7 @@
                 </a:solidFill>
                 <a:latin typeface="Karla"/>
               </a:rPr>
-              <a:t>Check somebody else's against the four.</a:t>
+              <a:t>Check somebody else’s against the four.</a:t>
             </a:r>
           </a:p>
         </p:txBody>
@@ -10768,7 +10768,7 @@
                 </a:solidFill>
                 <a:latin typeface="Libre Caslon Display"/>
               </a:rPr>
-              <a:t>“I’m sorry you feel that way.”</a:t>
+              <a:t>“I’m sorry you took it that way.”</a:t>
             </a:r>
           </a:p>
         </p:txBody>
@@ -11052,7 +11052,7 @@
                 </a:solidFill>
                 <a:latin typeface="Karla"/>
               </a:rPr>
-              <a:t>Takes the person out.</a:t>
+              <a:t>Leaves out who did it.</a:t>
             </a:r>
           </a:p>
         </p:txBody>

--- a/tutor-time/the-apology/downloads/The_Apology.pptx
+++ b/tutor-time/the-apology/downloads/The_Apology.pptx
@@ -3200,11 +3200,11 @@
               </a:spcAft>
             </a:pPr>
             <a:r>
-              <a:rPr sz="5000" b="1" i="0">
+              <a:rPr sz="5000" b="0" i="0">
                 <a:solidFill>
                   <a:srgbClr val="9A4030"/>
                 </a:solidFill>
-                <a:latin typeface="Libre Caslon Display"/>
+                <a:latin typeface="Georgia"/>
               </a:rPr>
               <a:t>The Apology</a:t>
             </a:r>
@@ -3290,7 +3290,7 @@
                 <a:solidFill>
                   <a:srgbClr val="7A6862"/>
                 </a:solidFill>
-                <a:latin typeface="Karla"/>
+                <a:latin typeface="Calibri"/>
               </a:rPr>
               <a:t>Everyone says it. Almost nobody is taught how.</a:t>
             </a:r>
@@ -3332,7 +3332,7 @@
                 <a:solidFill>
                   <a:srgbClr val="AD9C96"/>
                 </a:solidFill>
-                <a:latin typeface="Karla"/>
+                <a:latin typeface="Calibri"/>
               </a:rPr>
               <a:t>One lesson</a:t>
             </a:r>
@@ -3398,7 +3398,7 @@
                 <a:solidFill>
                   <a:srgbClr val="AD9C96"/>
                 </a:solidFill>
-                <a:latin typeface="Karla"/>
+                <a:latin typeface="Calibri"/>
               </a:rPr>
               <a:t>The Pastoral Guide</a:t>
             </a:r>
@@ -3440,7 +3440,7 @@
                 <a:solidFill>
                   <a:srgbClr val="AD9C96"/>
                 </a:solidFill>
-                <a:latin typeface="Karla"/>
+                <a:latin typeface="Calibri"/>
               </a:rPr>
               <a:t>1 / 14</a:t>
             </a:r>
@@ -3544,95 +3544,7 @@
                 <a:solidFill>
                   <a:srgbClr val="CD8878"/>
                 </a:solidFill>
-                <a:latin typeface="Karla"/>
-              </a:rPr>
-              <a:t>SWAP</a:t>
-            </a:r>
-          </a:p>
-        </p:txBody>
-      </p:sp>
-      <p:sp>
-        <p:nvSpPr>
-          <p:cNvPr id="4" name="Rounded Rectangle 3"/>
-          <p:cNvSpPr/>
-          <p:nvPr/>
-        </p:nvSpPr>
-        <p:spPr>
-          <a:xfrm>
-            <a:off x="7086600" y="530352"/>
-            <a:ext cx="1371600" cy="347472"/>
-          </a:xfrm>
-          <a:prstGeom prst="roundRect">
-            <a:avLst>
-              <a:gd name="adj" fmla="val 50000"/>
-            </a:avLst>
-          </a:prstGeom>
-          <a:solidFill>
-            <a:srgbClr val="FAEEE9"/>
-          </a:solidFill>
-          <a:ln>
-            <a:noFill/>
-          </a:ln>
-          <a:effectLst/>
-        </p:spPr>
-        <p:style>
-          <a:lnRef idx="1">
-            <a:schemeClr val="accent1"/>
-          </a:lnRef>
-          <a:fillRef idx="3">
-            <a:schemeClr val="accent1"/>
-          </a:fillRef>
-          <a:effectRef idx="2">
-            <a:schemeClr val="accent1"/>
-          </a:effectRef>
-          <a:fontRef idx="minor">
-            <a:schemeClr val="lt1"/>
-          </a:fontRef>
-        </p:style>
-        <p:txBody>
-          <a:bodyPr rtlCol="0" anchor="ctr"/>
-          <a:lstStyle/>
-          <a:p>
-            <a:pPr algn="ctr"/>
-          </a:p>
-        </p:txBody>
-      </p:sp>
-      <p:sp>
-        <p:nvSpPr>
-          <p:cNvPr id="5" name="TextBox 4"/>
-          <p:cNvSpPr txBox="1"/>
-          <p:nvPr/>
-        </p:nvSpPr>
-        <p:spPr>
-          <a:xfrm>
-            <a:off x="7086600" y="589788"/>
-            <a:ext cx="1371600" cy="237744"/>
-          </a:xfrm>
-          <a:prstGeom prst="rect">
-            <a:avLst/>
-          </a:prstGeom>
-          <a:noFill/>
-        </p:spPr>
-        <p:txBody>
-          <a:bodyPr wrap="square" lIns="0" rIns="0" tIns="0" bIns="0" anchor="t">
-            <a:spAutoFit/>
-          </a:bodyPr>
-          <a:lstStyle/>
-          <a:p>
-            <a:pPr algn="ctr">
-              <a:lnSpc>
-                <a:spcPct val="125000"/>
-              </a:lnSpc>
-              <a:spcAft>
-                <a:spcPts val="0"/>
-              </a:spcAft>
-            </a:pPr>
-            <a:r>
-              <a:rPr sz="1000" b="1" i="0" spc="100">
-                <a:solidFill>
-                  <a:srgbClr val="9A4030"/>
-                </a:solidFill>
-                <a:latin typeface="Karla"/>
+                <a:latin typeface="Calibri"/>
               </a:rPr>
               <a:t>SWAP</a:t>
             </a:r>
@@ -3670,11 +3582,11 @@
               </a:spcAft>
             </a:pPr>
             <a:r>
-              <a:rPr sz="3100" b="1" i="0">
+              <a:rPr sz="3100" b="0" i="0">
                 <a:solidFill>
                   <a:srgbClr val="463A36"/>
                 </a:solidFill>
-                <a:latin typeface="Libre Caslon Display"/>
+                <a:latin typeface="Georgia"/>
               </a:rPr>
               <a:t>Mark somebody else’s</a:t>
             </a:r>
@@ -3716,7 +3628,7 @@
                 <a:solidFill>
                   <a:srgbClr val="7A6862"/>
                 </a:solidFill>
-                <a:latin typeface="Karla"/>
+                <a:latin typeface="Calibri"/>
               </a:rPr>
               <a:t>Pass your sheet two tables along. Mark it against the four parts.</a:t>
             </a:r>
@@ -3874,7 +3786,7 @@
                 <a:solidFill>
                   <a:srgbClr val="463A36"/>
                 </a:solidFill>
-                <a:latin typeface="Karla"/>
+                <a:latin typeface="Calibri"/>
               </a:rPr>
               <a:t>Does it say what they did, in their own words?</a:t>
             </a:r>
@@ -4032,7 +3944,7 @@
                 <a:solidFill>
                   <a:srgbClr val="463A36"/>
                 </a:solidFill>
-                <a:latin typeface="Karla"/>
+                <a:latin typeface="Calibri"/>
               </a:rPr>
               <a:t>Does it show they understand why it mattered?</a:t>
             </a:r>
@@ -4190,7 +4102,7 @@
                 <a:solidFill>
                   <a:srgbClr val="463A36"/>
                 </a:solidFill>
-                <a:latin typeface="Karla"/>
+                <a:latin typeface="Calibri"/>
               </a:rPr>
               <a:t>Is there a but anywhere? Circle it.</a:t>
             </a:r>
@@ -4348,7 +4260,7 @@
                 <a:solidFill>
                   <a:srgbClr val="463A36"/>
                 </a:solidFill>
-                <a:latin typeface="Karla"/>
+                <a:latin typeface="Calibri"/>
               </a:rPr>
               <a:t>Is there one specific thing they will do differently?</a:t>
             </a:r>
@@ -4390,7 +4302,7 @@
                 <a:solidFill>
                   <a:srgbClr val="9A4030"/>
                 </a:solidFill>
-                <a:latin typeface="Karla"/>
+                <a:latin typeface="Calibri"/>
               </a:rPr>
               <a:t>Then one sentence at the bottom: which part is weakest, and why.</a:t>
             </a:r>
@@ -4456,7 +4368,7 @@
                 <a:solidFill>
                   <a:srgbClr val="AD9C96"/>
                 </a:solidFill>
-                <a:latin typeface="Karla"/>
+                <a:latin typeface="Calibri"/>
               </a:rPr>
               <a:t>The Pastoral Guide</a:t>
             </a:r>
@@ -4498,7 +4410,7 @@
                 <a:solidFill>
                   <a:srgbClr val="AD9C96"/>
                 </a:solidFill>
-                <a:latin typeface="Karla"/>
+                <a:latin typeface="Calibri"/>
               </a:rPr>
               <a:t>10 / 14</a:t>
             </a:r>
@@ -4602,97 +4514,9 @@
                 <a:solidFill>
                   <a:srgbClr val="CD8878"/>
                 </a:solidFill>
-                <a:latin typeface="Karla"/>
+                <a:latin typeface="Calibri"/>
               </a:rPr>
               <a:t>THE HARDER BIT</a:t>
-            </a:r>
-          </a:p>
-        </p:txBody>
-      </p:sp>
-      <p:sp>
-        <p:nvSpPr>
-          <p:cNvPr id="4" name="Rounded Rectangle 3"/>
-          <p:cNvSpPr/>
-          <p:nvPr/>
-        </p:nvSpPr>
-        <p:spPr>
-          <a:xfrm>
-            <a:off x="7086600" y="530352"/>
-            <a:ext cx="1371600" cy="347472"/>
-          </a:xfrm>
-          <a:prstGeom prst="roundRect">
-            <a:avLst>
-              <a:gd name="adj" fmla="val 50000"/>
-            </a:avLst>
-          </a:prstGeom>
-          <a:solidFill>
-            <a:srgbClr val="FAEEE9"/>
-          </a:solidFill>
-          <a:ln>
-            <a:noFill/>
-          </a:ln>
-          <a:effectLst/>
-        </p:spPr>
-        <p:style>
-          <a:lnRef idx="1">
-            <a:schemeClr val="accent1"/>
-          </a:lnRef>
-          <a:fillRef idx="3">
-            <a:schemeClr val="accent1"/>
-          </a:fillRef>
-          <a:effectRef idx="2">
-            <a:schemeClr val="accent1"/>
-          </a:effectRef>
-          <a:fontRef idx="minor">
-            <a:schemeClr val="lt1"/>
-          </a:fontRef>
-        </p:style>
-        <p:txBody>
-          <a:bodyPr rtlCol="0" anchor="ctr"/>
-          <a:lstStyle/>
-          <a:p>
-            <a:pPr algn="ctr"/>
-          </a:p>
-        </p:txBody>
-      </p:sp>
-      <p:sp>
-        <p:nvSpPr>
-          <p:cNvPr id="5" name="TextBox 4"/>
-          <p:cNvSpPr txBox="1"/>
-          <p:nvPr/>
-        </p:nvSpPr>
-        <p:spPr>
-          <a:xfrm>
-            <a:off x="7086600" y="589788"/>
-            <a:ext cx="1371600" cy="237744"/>
-          </a:xfrm>
-          <a:prstGeom prst="rect">
-            <a:avLst/>
-          </a:prstGeom>
-          <a:noFill/>
-        </p:spPr>
-        <p:txBody>
-          <a:bodyPr wrap="square" lIns="0" rIns="0" tIns="0" bIns="0" anchor="t">
-            <a:spAutoFit/>
-          </a:bodyPr>
-          <a:lstStyle/>
-          <a:p>
-            <a:pPr algn="ctr">
-              <a:lnSpc>
-                <a:spcPct val="125000"/>
-              </a:lnSpc>
-              <a:spcAft>
-                <a:spcPts val="0"/>
-              </a:spcAft>
-            </a:pPr>
-            <a:r>
-              <a:rPr sz="1000" b="1" i="0" spc="100">
-                <a:solidFill>
-                  <a:srgbClr val="9A4030"/>
-                </a:solidFill>
-                <a:latin typeface="Karla"/>
-              </a:rPr>
-              <a:t>DISCUSS</a:t>
             </a:r>
           </a:p>
         </p:txBody>
@@ -4728,11 +4552,11 @@
               </a:spcAft>
             </a:pPr>
             <a:r>
-              <a:rPr sz="3100" b="1" i="0">
+              <a:rPr sz="3100" b="0" i="0">
                 <a:solidFill>
                   <a:srgbClr val="463A36"/>
                 </a:solidFill>
-                <a:latin typeface="Libre Caslon Display"/>
+                <a:latin typeface="Georgia"/>
               </a:rPr>
               <a:t>Three hard questions</a:t>
             </a:r>
@@ -4862,11 +4686,11 @@
               </a:spcAft>
             </a:pPr>
             <a:r>
-              <a:rPr sz="1500" b="1" i="0">
+              <a:rPr sz="1500" b="0" i="0">
                 <a:solidFill>
                   <a:srgbClr val="FFFDF7"/>
                 </a:solidFill>
-                <a:latin typeface="Libre Caslon Display"/>
+                <a:latin typeface="Georgia"/>
               </a:rPr>
               <a:t>1</a:t>
             </a:r>
@@ -4908,7 +4732,7 @@
                 <a:solidFill>
                   <a:srgbClr val="463A36"/>
                 </a:solidFill>
-                <a:latin typeface="Karla"/>
+                <a:latin typeface="Calibri"/>
               </a:rPr>
               <a:t>Does an apology have to be accepted?</a:t>
             </a:r>
@@ -5038,11 +4862,11 @@
               </a:spcAft>
             </a:pPr>
             <a:r>
-              <a:rPr sz="1500" b="1" i="0">
+              <a:rPr sz="1500" b="0" i="0">
                 <a:solidFill>
                   <a:srgbClr val="FFFDF7"/>
                 </a:solidFill>
-                <a:latin typeface="Libre Caslon Display"/>
+                <a:latin typeface="Georgia"/>
               </a:rPr>
               <a:t>2</a:t>
             </a:r>
@@ -5084,7 +4908,7 @@
                 <a:solidFill>
                   <a:srgbClr val="463A36"/>
                 </a:solidFill>
-                <a:latin typeface="Karla"/>
+                <a:latin typeface="Calibri"/>
               </a:rPr>
               <a:t>Can you apologise for something you still think you were right about?</a:t>
             </a:r>
@@ -5214,11 +5038,11 @@
               </a:spcAft>
             </a:pPr>
             <a:r>
-              <a:rPr sz="1500" b="1" i="0">
+              <a:rPr sz="1500" b="0" i="0">
                 <a:solidFill>
                   <a:srgbClr val="FFFDF7"/>
                 </a:solidFill>
-                <a:latin typeface="Libre Caslon Display"/>
+                <a:latin typeface="Georgia"/>
               </a:rPr>
               <a:t>3</a:t>
             </a:r>
@@ -5260,7 +5084,7 @@
                 <a:solidFill>
                   <a:srgbClr val="463A36"/>
                 </a:solidFill>
-                <a:latin typeface="Karla"/>
+                <a:latin typeface="Calibri"/>
               </a:rPr>
               <a:t>Is there a point where it is too late to say it?</a:t>
             </a:r>
@@ -5302,7 +5126,7 @@
                 <a:solidFill>
                   <a:srgbClr val="7A6862"/>
                 </a:solidFill>
-                <a:latin typeface="Karla"/>
+                <a:latin typeface="Calibri"/>
               </a:rPr>
               <a:t>Talk to the person next to you, then take a few answers.</a:t>
             </a:r>
@@ -5368,7 +5192,7 @@
                 <a:solidFill>
                   <a:srgbClr val="AD9C96"/>
                 </a:solidFill>
-                <a:latin typeface="Karla"/>
+                <a:latin typeface="Calibri"/>
               </a:rPr>
               <a:t>The Pastoral Guide</a:t>
             </a:r>
@@ -5410,7 +5234,7 @@
                 <a:solidFill>
                   <a:srgbClr val="AD9C96"/>
                 </a:solidFill>
-                <a:latin typeface="Karla"/>
+                <a:latin typeface="Calibri"/>
               </a:rPr>
               <a:t>11 / 14</a:t>
             </a:r>
@@ -5514,97 +5338,9 @@
                 <a:solidFill>
                   <a:srgbClr val="CD8878"/>
                 </a:solidFill>
-                <a:latin typeface="Karla"/>
+                <a:latin typeface="Calibri"/>
               </a:rPr>
               <a:t>TWO THINGS WORTH KNOWING</a:t>
-            </a:r>
-          </a:p>
-        </p:txBody>
-      </p:sp>
-      <p:sp>
-        <p:nvSpPr>
-          <p:cNvPr id="4" name="Rounded Rectangle 3"/>
-          <p:cNvSpPr/>
-          <p:nvPr/>
-        </p:nvSpPr>
-        <p:spPr>
-          <a:xfrm>
-            <a:off x="7086600" y="530352"/>
-            <a:ext cx="1371600" cy="347472"/>
-          </a:xfrm>
-          <a:prstGeom prst="roundRect">
-            <a:avLst>
-              <a:gd name="adj" fmla="val 50000"/>
-            </a:avLst>
-          </a:prstGeom>
-          <a:solidFill>
-            <a:srgbClr val="FAEEE9"/>
-          </a:solidFill>
-          <a:ln>
-            <a:noFill/>
-          </a:ln>
-          <a:effectLst/>
-        </p:spPr>
-        <p:style>
-          <a:lnRef idx="1">
-            <a:schemeClr val="accent1"/>
-          </a:lnRef>
-          <a:fillRef idx="3">
-            <a:schemeClr val="accent1"/>
-          </a:fillRef>
-          <a:effectRef idx="2">
-            <a:schemeClr val="accent1"/>
-          </a:effectRef>
-          <a:fontRef idx="minor">
-            <a:schemeClr val="lt1"/>
-          </a:fontRef>
-        </p:style>
-        <p:txBody>
-          <a:bodyPr rtlCol="0" anchor="ctr"/>
-          <a:lstStyle/>
-          <a:p>
-            <a:pPr algn="ctr"/>
-          </a:p>
-        </p:txBody>
-      </p:sp>
-      <p:sp>
-        <p:nvSpPr>
-          <p:cNvPr id="5" name="TextBox 4"/>
-          <p:cNvSpPr txBox="1"/>
-          <p:nvPr/>
-        </p:nvSpPr>
-        <p:spPr>
-          <a:xfrm>
-            <a:off x="7086600" y="589788"/>
-            <a:ext cx="1371600" cy="237744"/>
-          </a:xfrm>
-          <a:prstGeom prst="rect">
-            <a:avLst/>
-          </a:prstGeom>
-          <a:noFill/>
-        </p:spPr>
-        <p:txBody>
-          <a:bodyPr wrap="square" lIns="0" rIns="0" tIns="0" bIns="0" anchor="t">
-            <a:spAutoFit/>
-          </a:bodyPr>
-          <a:lstStyle/>
-          <a:p>
-            <a:pPr algn="ctr">
-              <a:lnSpc>
-                <a:spcPct val="125000"/>
-              </a:lnSpc>
-              <a:spcAft>
-                <a:spcPts val="0"/>
-              </a:spcAft>
-            </a:pPr>
-            <a:r>
-              <a:rPr sz="1000" b="1" i="0" spc="100">
-                <a:solidFill>
-                  <a:srgbClr val="9A4030"/>
-                </a:solidFill>
-                <a:latin typeface="Karla"/>
-              </a:rPr>
-              <a:t>TEACH</a:t>
             </a:r>
           </a:p>
         </p:txBody>
@@ -5640,11 +5376,11 @@
               </a:spcAft>
             </a:pPr>
             <a:r>
-              <a:rPr sz="3100" b="1" i="0">
+              <a:rPr sz="3100" b="0" i="0">
                 <a:solidFill>
                   <a:srgbClr val="463A36"/>
                 </a:solidFill>
-                <a:latin typeface="Libre Caslon Display"/>
+                <a:latin typeface="Georgia"/>
               </a:rPr>
               <a:t>An apology is not a request</a:t>
             </a:r>
@@ -5730,11 +5466,11 @@
               </a:spcAft>
             </a:pPr>
             <a:r>
-              <a:rPr sz="1600" b="1" i="0">
+              <a:rPr sz="1600" b="0" i="0">
                 <a:solidFill>
                   <a:srgbClr val="9A4030"/>
                 </a:solidFill>
-                <a:latin typeface="Libre Caslon Display"/>
+                <a:latin typeface="Georgia"/>
               </a:rPr>
               <a:t>It does not come with forgiveness attached.</a:t>
             </a:r>
@@ -5776,7 +5512,7 @@
                 <a:solidFill>
                   <a:srgbClr val="7A6862"/>
                 </a:solidFill>
-                <a:latin typeface="Karla"/>
+                <a:latin typeface="Calibri"/>
               </a:rPr>
               <a:t>You are not owed anything back. Apologising so somebody will say it is fine is a favour you are asking for, not an apology you are giving.</a:t>
             </a:r>
@@ -5862,11 +5598,11 @@
               </a:spcAft>
             </a:pPr>
             <a:r>
-              <a:rPr sz="1600" b="1" i="0">
+              <a:rPr sz="1600" b="0" i="0">
                 <a:solidFill>
                   <a:srgbClr val="9A4030"/>
                 </a:solidFill>
-                <a:latin typeface="Libre Caslon Display"/>
+                <a:latin typeface="Georgia"/>
               </a:rPr>
               <a:t>You do not have to send it.</a:t>
             </a:r>
@@ -5908,7 +5644,7 @@
                 <a:solidFill>
                   <a:srgbClr val="7A6862"/>
                 </a:solidFill>
-                <a:latin typeface="Karla"/>
+                <a:latin typeface="Calibri"/>
               </a:rPr>
               <a:t>Some of the things people most need to say are to somebody who is not around any more. Writing it still does something.</a:t>
             </a:r>
@@ -5974,7 +5710,7 @@
                 <a:solidFill>
                   <a:srgbClr val="AD9C96"/>
                 </a:solidFill>
-                <a:latin typeface="Karla"/>
+                <a:latin typeface="Calibri"/>
               </a:rPr>
               <a:t>The Pastoral Guide</a:t>
             </a:r>
@@ -6016,7 +5752,7 @@
                 <a:solidFill>
                   <a:srgbClr val="AD9C96"/>
                 </a:solidFill>
-                <a:latin typeface="Karla"/>
+                <a:latin typeface="Calibri"/>
               </a:rPr>
               <a:t>12 / 14</a:t>
             </a:r>
@@ -6120,97 +5856,9 @@
                 <a:solidFill>
                   <a:srgbClr val="EBC4B6"/>
                 </a:solidFill>
-                <a:latin typeface="Karla"/>
+                <a:latin typeface="Calibri"/>
               </a:rPr>
               <a:t>BEFORE YOU GO</a:t>
-            </a:r>
-          </a:p>
-        </p:txBody>
-      </p:sp>
-      <p:sp>
-        <p:nvSpPr>
-          <p:cNvPr id="4" name="Rounded Rectangle 3"/>
-          <p:cNvSpPr/>
-          <p:nvPr/>
-        </p:nvSpPr>
-        <p:spPr>
-          <a:xfrm>
-            <a:off x="7086600" y="530352"/>
-            <a:ext cx="1371600" cy="347472"/>
-          </a:xfrm>
-          <a:prstGeom prst="roundRect">
-            <a:avLst>
-              <a:gd name="adj" fmla="val 50000"/>
-            </a:avLst>
-          </a:prstGeom>
-          <a:solidFill>
-            <a:srgbClr val="FFFDF7"/>
-          </a:solidFill>
-          <a:ln>
-            <a:noFill/>
-          </a:ln>
-          <a:effectLst/>
-        </p:spPr>
-        <p:style>
-          <a:lnRef idx="1">
-            <a:schemeClr val="accent1"/>
-          </a:lnRef>
-          <a:fillRef idx="3">
-            <a:schemeClr val="accent1"/>
-          </a:fillRef>
-          <a:effectRef idx="2">
-            <a:schemeClr val="accent1"/>
-          </a:effectRef>
-          <a:fontRef idx="minor">
-            <a:schemeClr val="lt1"/>
-          </a:fontRef>
-        </p:style>
-        <p:txBody>
-          <a:bodyPr rtlCol="0" anchor="ctr"/>
-          <a:lstStyle/>
-          <a:p>
-            <a:pPr algn="ctr"/>
-          </a:p>
-        </p:txBody>
-      </p:sp>
-      <p:sp>
-        <p:nvSpPr>
-          <p:cNvPr id="5" name="TextBox 4"/>
-          <p:cNvSpPr txBox="1"/>
-          <p:nvPr/>
-        </p:nvSpPr>
-        <p:spPr>
-          <a:xfrm>
-            <a:off x="7086600" y="589788"/>
-            <a:ext cx="1371600" cy="237744"/>
-          </a:xfrm>
-          <a:prstGeom prst="rect">
-            <a:avLst/>
-          </a:prstGeom>
-          <a:noFill/>
-        </p:spPr>
-        <p:txBody>
-          <a:bodyPr wrap="square" lIns="0" rIns="0" tIns="0" bIns="0" anchor="t">
-            <a:spAutoFit/>
-          </a:bodyPr>
-          <a:lstStyle/>
-          <a:p>
-            <a:pPr algn="ctr">
-              <a:lnSpc>
-                <a:spcPct val="125000"/>
-              </a:lnSpc>
-              <a:spcAft>
-                <a:spcPts val="0"/>
-              </a:spcAft>
-            </a:pPr>
-            <a:r>
-              <a:rPr sz="1000" b="1" i="0" spc="100">
-                <a:solidFill>
-                  <a:srgbClr val="9A4030"/>
-                </a:solidFill>
-                <a:latin typeface="Karla"/>
-              </a:rPr>
-              <a:t>EXIT SLIP</a:t>
             </a:r>
           </a:p>
         </p:txBody>
@@ -6246,11 +5894,11 @@
               </a:spcAft>
             </a:pPr>
             <a:r>
-              <a:rPr sz="3400" b="1" i="0">
+              <a:rPr sz="3400" b="0" i="0">
                 <a:solidFill>
                   <a:srgbClr val="FFFDF7"/>
                 </a:solidFill>
-                <a:latin typeface="Libre Caslon Display"/>
+                <a:latin typeface="Georgia"/>
               </a:rPr>
               <a:t>One you actually owe</a:t>
             </a:r>
@@ -6380,11 +6028,11 @@
               </a:spcAft>
             </a:pPr>
             <a:r>
-              <a:rPr sz="1300" b="1" i="0">
+              <a:rPr sz="1300" b="0" i="0">
                 <a:solidFill>
                   <a:srgbClr val="FFFDF7"/>
                 </a:solidFill>
-                <a:latin typeface="Libre Caslon Display"/>
+                <a:latin typeface="Georgia"/>
               </a:rPr>
               <a:t>1</a:t>
             </a:r>
@@ -6426,7 +6074,7 @@
                 <a:solidFill>
                   <a:srgbClr val="9A4030"/>
                 </a:solidFill>
-                <a:latin typeface="Karla"/>
+                <a:latin typeface="Calibri"/>
               </a:rPr>
               <a:t>Take a slip. Small is fine. It does not have to be recent.</a:t>
             </a:r>
@@ -6556,11 +6204,11 @@
               </a:spcAft>
             </a:pPr>
             <a:r>
-              <a:rPr sz="1300" b="1" i="0">
+              <a:rPr sz="1300" b="0" i="0">
                 <a:solidFill>
                   <a:srgbClr val="FFFDF7"/>
                 </a:solidFill>
-                <a:latin typeface="Libre Caslon Display"/>
+                <a:latin typeface="Georgia"/>
               </a:rPr>
               <a:t>2</a:t>
             </a:r>
@@ -6602,7 +6250,7 @@
                 <a:solidFill>
                   <a:srgbClr val="9A4030"/>
                 </a:solidFill>
-                <a:latin typeface="Karla"/>
+                <a:latin typeface="Calibri"/>
               </a:rPr>
               <a:t>Nobody reads it. Nobody collects it. Fold it and keep it.</a:t>
             </a:r>
@@ -6732,11 +6380,11 @@
               </a:spcAft>
             </a:pPr>
             <a:r>
-              <a:rPr sz="1300" b="1" i="0">
+              <a:rPr sz="1300" b="0" i="0">
                 <a:solidFill>
                   <a:srgbClr val="FFFDF7"/>
                 </a:solidFill>
-                <a:latin typeface="Libre Caslon Display"/>
+                <a:latin typeface="Georgia"/>
               </a:rPr>
               <a:t>3</a:t>
             </a:r>
@@ -6778,7 +6426,7 @@
                 <a:solidFill>
                   <a:srgbClr val="9A4030"/>
                 </a:solidFill>
-                <a:latin typeface="Karla"/>
+                <a:latin typeface="Calibri"/>
               </a:rPr>
               <a:t>You do not have to send it.</a:t>
             </a:r>
@@ -6844,7 +6492,7 @@
                 <a:solidFill>
                   <a:srgbClr val="EBC4B6"/>
                 </a:solidFill>
-                <a:latin typeface="Karla"/>
+                <a:latin typeface="Calibri"/>
               </a:rPr>
               <a:t>The Pastoral Guide</a:t>
             </a:r>
@@ -6886,7 +6534,7 @@
                 <a:solidFill>
                   <a:srgbClr val="EBC4B6"/>
                 </a:solidFill>
-                <a:latin typeface="Karla"/>
+                <a:latin typeface="Calibri"/>
               </a:rPr>
               <a:t>13 / 14</a:t>
             </a:r>
@@ -7010,11 +6658,11 @@
               </a:spcAft>
             </a:pPr>
             <a:r>
-              <a:rPr sz="3400" b="1" i="0">
+              <a:rPr sz="3400" b="0" i="0">
                 <a:solidFill>
                   <a:srgbClr val="9A4030"/>
                 </a:solidFill>
-                <a:latin typeface="Libre Caslon Display"/>
+                <a:latin typeface="Georgia"/>
               </a:rPr>
               <a:t>Sorry is the easy part.</a:t>
             </a:r>
@@ -7056,7 +6704,7 @@
                 <a:solidFill>
                   <a:srgbClr val="7A6862"/>
                 </a:solidFill>
-                <a:latin typeface="Karla"/>
+                <a:latin typeface="Calibri"/>
               </a:rPr>
               <a:t>Saying what you did, and what you will do instead, is the bit that costs something. That is the bit people remember.</a:t>
             </a:r>
@@ -7098,7 +6746,7 @@
                 <a:solidFill>
                   <a:srgbClr val="AD9C96"/>
                 </a:solidFill>
-                <a:latin typeface="Karla"/>
+                <a:latin typeface="Calibri"/>
               </a:rPr>
               <a:t>The Apology  ·  A tutor time lesson</a:t>
             </a:r>
@@ -7164,7 +6812,7 @@
                 <a:solidFill>
                   <a:srgbClr val="AD9C96"/>
                 </a:solidFill>
-                <a:latin typeface="Karla"/>
+                <a:latin typeface="Calibri"/>
               </a:rPr>
               <a:t>The Pastoral Guide</a:t>
             </a:r>
@@ -7206,7 +6854,7 @@
                 <a:solidFill>
                   <a:srgbClr val="AD9C96"/>
                 </a:solidFill>
-                <a:latin typeface="Karla"/>
+                <a:latin typeface="Calibri"/>
               </a:rPr>
               <a:t>14 / 14</a:t>
             </a:r>
@@ -7310,7 +6958,7 @@
                 <a:solidFill>
                   <a:srgbClr val="CD8878"/>
                 </a:solidFill>
-                <a:latin typeface="Karla"/>
+                <a:latin typeface="Calibri"/>
               </a:rPr>
               <a:t>TODAY</a:t>
             </a:r>
@@ -7348,11 +6996,11 @@
               </a:spcAft>
             </a:pPr>
             <a:r>
-              <a:rPr sz="3100" b="1" i="0">
+              <a:rPr sz="3100" b="0" i="0">
                 <a:solidFill>
                   <a:srgbClr val="463A36"/>
                 </a:solidFill>
-                <a:latin typeface="Libre Caslon Display"/>
+                <a:latin typeface="Georgia"/>
               </a:rPr>
               <a:t>Five things, in this order</a:t>
             </a:r>
@@ -7482,11 +7130,11 @@
               </a:spcAft>
             </a:pPr>
             <a:r>
-              <a:rPr sz="1800" b="1" i="0">
+              <a:rPr sz="1800" b="0" i="0">
                 <a:solidFill>
                   <a:srgbClr val="FFFDF7"/>
                 </a:solidFill>
-                <a:latin typeface="Libre Caslon Display"/>
+                <a:latin typeface="Georgia"/>
               </a:rPr>
               <a:t>1</a:t>
             </a:r>
@@ -7524,11 +7172,11 @@
               </a:spcAft>
             </a:pPr>
             <a:r>
-              <a:rPr sz="1500" b="1" i="0">
+              <a:rPr sz="1500" b="0" i="0">
                 <a:solidFill>
                   <a:srgbClr val="9A4030"/>
                 </a:solidFill>
-                <a:latin typeface="Libre Caslon Display"/>
+                <a:latin typeface="Georgia"/>
               </a:rPr>
               <a:t>Sort</a:t>
             </a:r>
@@ -7570,7 +7218,7 @@
                 <a:solidFill>
                   <a:srgbClr val="7A6862"/>
                 </a:solidFill>
-                <a:latin typeface="Karla"/>
+                <a:latin typeface="Calibri"/>
               </a:rPr>
               <a:t>Which of these are real apologies?</a:t>
             </a:r>
@@ -7700,11 +7348,11 @@
               </a:spcAft>
             </a:pPr>
             <a:r>
-              <a:rPr sz="1800" b="1" i="0">
+              <a:rPr sz="1800" b="0" i="0">
                 <a:solidFill>
                   <a:srgbClr val="FFFDF7"/>
                 </a:solidFill>
-                <a:latin typeface="Libre Caslon Display"/>
+                <a:latin typeface="Georgia"/>
               </a:rPr>
               <a:t>2</a:t>
             </a:r>
@@ -7742,11 +7390,11 @@
               </a:spcAft>
             </a:pPr>
             <a:r>
-              <a:rPr sz="1500" b="1" i="0">
+              <a:rPr sz="1500" b="0" i="0">
                 <a:solidFill>
                   <a:srgbClr val="9A4030"/>
                 </a:solidFill>
-                <a:latin typeface="Libre Caslon Display"/>
+                <a:latin typeface="Georgia"/>
               </a:rPr>
               <a:t>Learn</a:t>
             </a:r>
@@ -7788,7 +7436,7 @@
                 <a:solidFill>
                   <a:srgbClr val="7A6862"/>
                 </a:solidFill>
-                <a:latin typeface="Karla"/>
+                <a:latin typeface="Calibri"/>
               </a:rPr>
               <a:t>The four parts of one that is.</a:t>
             </a:r>
@@ -7918,11 +7566,11 @@
               </a:spcAft>
             </a:pPr>
             <a:r>
-              <a:rPr sz="1800" b="1" i="0">
+              <a:rPr sz="1800" b="0" i="0">
                 <a:solidFill>
                   <a:srgbClr val="FFFDF7"/>
                 </a:solidFill>
-                <a:latin typeface="Libre Caslon Display"/>
+                <a:latin typeface="Georgia"/>
               </a:rPr>
               <a:t>3</a:t>
             </a:r>
@@ -7960,11 +7608,11 @@
               </a:spcAft>
             </a:pPr>
             <a:r>
-              <a:rPr sz="1500" b="1" i="0">
+              <a:rPr sz="1500" b="0" i="0">
                 <a:solidFill>
                   <a:srgbClr val="9A4030"/>
                 </a:solidFill>
-                <a:latin typeface="Libre Caslon Display"/>
+                <a:latin typeface="Georgia"/>
               </a:rPr>
               <a:t>Fix</a:t>
             </a:r>
@@ -8006,7 +7654,7 @@
                 <a:solidFill>
                   <a:srgbClr val="7A6862"/>
                 </a:solidFill>
-                <a:latin typeface="Karla"/>
+                <a:latin typeface="Calibri"/>
               </a:rPr>
               <a:t>Rewrite a bad one, in pairs.</a:t>
             </a:r>
@@ -8136,11 +7784,11 @@
               </a:spcAft>
             </a:pPr>
             <a:r>
-              <a:rPr sz="1800" b="1" i="0">
+              <a:rPr sz="1800" b="0" i="0">
                 <a:solidFill>
                   <a:srgbClr val="FFFDF7"/>
                 </a:solidFill>
-                <a:latin typeface="Libre Caslon Display"/>
+                <a:latin typeface="Georgia"/>
               </a:rPr>
               <a:t>4</a:t>
             </a:r>
@@ -8178,11 +7826,11 @@
               </a:spcAft>
             </a:pPr>
             <a:r>
-              <a:rPr sz="1500" b="1" i="0">
+              <a:rPr sz="1500" b="0" i="0">
                 <a:solidFill>
                   <a:srgbClr val="9A4030"/>
                 </a:solidFill>
-                <a:latin typeface="Libre Caslon Display"/>
+                <a:latin typeface="Georgia"/>
               </a:rPr>
               <a:t>Mark</a:t>
             </a:r>
@@ -8224,7 +7872,7 @@
                 <a:solidFill>
                   <a:srgbClr val="7A6862"/>
                 </a:solidFill>
-                <a:latin typeface="Karla"/>
+                <a:latin typeface="Calibri"/>
               </a:rPr>
               <a:t>Check somebody else’s against the four.</a:t>
             </a:r>
@@ -8354,11 +8002,11 @@
               </a:spcAft>
             </a:pPr>
             <a:r>
-              <a:rPr sz="1800" b="1" i="0">
+              <a:rPr sz="1800" b="0" i="0">
                 <a:solidFill>
                   <a:srgbClr val="FFFDF7"/>
                 </a:solidFill>
-                <a:latin typeface="Libre Caslon Display"/>
+                <a:latin typeface="Georgia"/>
               </a:rPr>
               <a:t>5</a:t>
             </a:r>
@@ -8396,11 +8044,11 @@
               </a:spcAft>
             </a:pPr>
             <a:r>
-              <a:rPr sz="1500" b="1" i="0">
+              <a:rPr sz="1500" b="0" i="0">
                 <a:solidFill>
                   <a:srgbClr val="9A4030"/>
                 </a:solidFill>
-                <a:latin typeface="Libre Caslon Display"/>
+                <a:latin typeface="Georgia"/>
               </a:rPr>
               <a:t>Write</a:t>
             </a:r>
@@ -8442,7 +8090,7 @@
                 <a:solidFill>
                   <a:srgbClr val="7A6862"/>
                 </a:solidFill>
-                <a:latin typeface="Karla"/>
+                <a:latin typeface="Calibri"/>
               </a:rPr>
               <a:t>One you actually owe. Nobody reads it.</a:t>
             </a:r>
@@ -8484,7 +8132,7 @@
                 <a:solidFill>
                   <a:srgbClr val="9A4030"/>
                 </a:solidFill>
-                <a:latin typeface="Karla"/>
+                <a:latin typeface="Calibri"/>
               </a:rPr>
               <a:t>Nothing you write today gets read out or handed in.</a:t>
             </a:r>
@@ -8550,7 +8198,7 @@
                 <a:solidFill>
                   <a:srgbClr val="AD9C96"/>
                 </a:solidFill>
-                <a:latin typeface="Karla"/>
+                <a:latin typeface="Calibri"/>
               </a:rPr>
               <a:t>The Pastoral Guide</a:t>
             </a:r>
@@ -8592,7 +8240,7 @@
                 <a:solidFill>
                   <a:srgbClr val="AD9C96"/>
                 </a:solidFill>
-                <a:latin typeface="Karla"/>
+                <a:latin typeface="Calibri"/>
               </a:rPr>
               <a:t>2 / 14</a:t>
             </a:r>
@@ -8696,97 +8344,9 @@
                 <a:solidFill>
                   <a:srgbClr val="EBC4B6"/>
                 </a:solidFill>
-                <a:latin typeface="Karla"/>
+                <a:latin typeface="Calibri"/>
               </a:rPr>
               <a:t>FIRST UP</a:t>
-            </a:r>
-          </a:p>
-        </p:txBody>
-      </p:sp>
-      <p:sp>
-        <p:nvSpPr>
-          <p:cNvPr id="4" name="Rounded Rectangle 3"/>
-          <p:cNvSpPr/>
-          <p:nvPr/>
-        </p:nvSpPr>
-        <p:spPr>
-          <a:xfrm>
-            <a:off x="7086600" y="530352"/>
-            <a:ext cx="1371600" cy="347472"/>
-          </a:xfrm>
-          <a:prstGeom prst="roundRect">
-            <a:avLst>
-              <a:gd name="adj" fmla="val 50000"/>
-            </a:avLst>
-          </a:prstGeom>
-          <a:solidFill>
-            <a:srgbClr val="FFFDF7"/>
-          </a:solidFill>
-          <a:ln>
-            <a:noFill/>
-          </a:ln>
-          <a:effectLst/>
-        </p:spPr>
-        <p:style>
-          <a:lnRef idx="1">
-            <a:schemeClr val="accent1"/>
-          </a:lnRef>
-          <a:fillRef idx="3">
-            <a:schemeClr val="accent1"/>
-          </a:fillRef>
-          <a:effectRef idx="2">
-            <a:schemeClr val="accent1"/>
-          </a:effectRef>
-          <a:fontRef idx="minor">
-            <a:schemeClr val="lt1"/>
-          </a:fontRef>
-        </p:style>
-        <p:txBody>
-          <a:bodyPr rtlCol="0" anchor="ctr"/>
-          <a:lstStyle/>
-          <a:p>
-            <a:pPr algn="ctr"/>
-          </a:p>
-        </p:txBody>
-      </p:sp>
-      <p:sp>
-        <p:nvSpPr>
-          <p:cNvPr id="5" name="TextBox 4"/>
-          <p:cNvSpPr txBox="1"/>
-          <p:nvPr/>
-        </p:nvSpPr>
-        <p:spPr>
-          <a:xfrm>
-            <a:off x="7086600" y="589788"/>
-            <a:ext cx="1371600" cy="237744"/>
-          </a:xfrm>
-          <a:prstGeom prst="rect">
-            <a:avLst/>
-          </a:prstGeom>
-          <a:noFill/>
-        </p:spPr>
-        <p:txBody>
-          <a:bodyPr wrap="square" lIns="0" rIns="0" tIns="0" bIns="0" anchor="t">
-            <a:spAutoFit/>
-          </a:bodyPr>
-          <a:lstStyle/>
-          <a:p>
-            <a:pPr algn="ctr">
-              <a:lnSpc>
-                <a:spcPct val="125000"/>
-              </a:lnSpc>
-              <a:spcAft>
-                <a:spcPts val="0"/>
-              </a:spcAft>
-            </a:pPr>
-            <a:r>
-              <a:rPr sz="1000" b="1" i="0" spc="100">
-                <a:solidFill>
-                  <a:srgbClr val="9A4030"/>
-                </a:solidFill>
-                <a:latin typeface="Karla"/>
-              </a:rPr>
-              <a:t>STARTER</a:t>
             </a:r>
           </a:p>
         </p:txBody>
@@ -8822,11 +8382,11 @@
               </a:spcAft>
             </a:pPr>
             <a:r>
-              <a:rPr sz="3400" b="1" i="0">
+              <a:rPr sz="3400" b="0" i="0">
                 <a:solidFill>
                   <a:srgbClr val="FFFDF7"/>
                 </a:solidFill>
-                <a:latin typeface="Libre Caslon Display"/>
+                <a:latin typeface="Georgia"/>
               </a:rPr>
               <a:t>Sort them into two piles</a:t>
             </a:r>
@@ -8956,11 +8516,11 @@
               </a:spcAft>
             </a:pPr>
             <a:r>
-              <a:rPr sz="1300" b="1" i="0">
+              <a:rPr sz="1300" b="0" i="0">
                 <a:solidFill>
                   <a:srgbClr val="FFFDF7"/>
                 </a:solidFill>
-                <a:latin typeface="Libre Caslon Display"/>
+                <a:latin typeface="Georgia"/>
               </a:rPr>
               <a:t>1</a:t>
             </a:r>
@@ -9002,7 +8562,7 @@
                 <a:solidFill>
                   <a:srgbClr val="9A4030"/>
                 </a:solidFill>
-                <a:latin typeface="Karla"/>
+                <a:latin typeface="Calibri"/>
               </a:rPr>
               <a:t>Eight cards on your table. Real apology, or not?</a:t>
             </a:r>
@@ -9132,11 +8692,11 @@
               </a:spcAft>
             </a:pPr>
             <a:r>
-              <a:rPr sz="1300" b="1" i="0">
+              <a:rPr sz="1300" b="0" i="0">
                 <a:solidFill>
                   <a:srgbClr val="FFFDF7"/>
                 </a:solidFill>
-                <a:latin typeface="Libre Caslon Display"/>
+                <a:latin typeface="Georgia"/>
               </a:rPr>
               <a:t>2</a:t>
             </a:r>
@@ -9178,7 +8738,7 @@
                 <a:solidFill>
                   <a:srgbClr val="9A4030"/>
                 </a:solidFill>
-                <a:latin typeface="Karla"/>
+                <a:latin typeface="Calibri"/>
               </a:rPr>
               <a:t>Two piles. You will not agree on all eight.</a:t>
             </a:r>
@@ -9308,11 +8868,11 @@
               </a:spcAft>
             </a:pPr>
             <a:r>
-              <a:rPr sz="1300" b="1" i="0">
+              <a:rPr sz="1300" b="0" i="0">
                 <a:solidFill>
                   <a:srgbClr val="FFFDF7"/>
                 </a:solidFill>
-                <a:latin typeface="Libre Caslon Display"/>
+                <a:latin typeface="Georgia"/>
               </a:rPr>
               <a:t>3</a:t>
             </a:r>
@@ -9354,7 +8914,7 @@
                 <a:solidFill>
                   <a:srgbClr val="9A4030"/>
                 </a:solidFill>
-                <a:latin typeface="Karla"/>
+                <a:latin typeface="Calibri"/>
               </a:rPr>
               <a:t>Be ready to say why.</a:t>
             </a:r>
@@ -9420,7 +8980,7 @@
                 <a:solidFill>
                   <a:srgbClr val="EBC4B6"/>
                 </a:solidFill>
-                <a:latin typeface="Karla"/>
+                <a:latin typeface="Calibri"/>
               </a:rPr>
               <a:t>The Pastoral Guide</a:t>
             </a:r>
@@ -9462,7 +9022,7 @@
                 <a:solidFill>
                   <a:srgbClr val="EBC4B6"/>
                 </a:solidFill>
-                <a:latin typeface="Karla"/>
+                <a:latin typeface="Calibri"/>
               </a:rPr>
               <a:t>3 / 14</a:t>
             </a:r>
@@ -9566,95 +9126,7 @@
                 <a:solidFill>
                   <a:srgbClr val="CD8878"/>
                 </a:solidFill>
-                <a:latin typeface="Karla"/>
-              </a:rPr>
-              <a:t>FEEDBACK</a:t>
-            </a:r>
-          </a:p>
-        </p:txBody>
-      </p:sp>
-      <p:sp>
-        <p:nvSpPr>
-          <p:cNvPr id="4" name="Rounded Rectangle 3"/>
-          <p:cNvSpPr/>
-          <p:nvPr/>
-        </p:nvSpPr>
-        <p:spPr>
-          <a:xfrm>
-            <a:off x="7059168" y="530352"/>
-            <a:ext cx="1399032" cy="347472"/>
-          </a:xfrm>
-          <a:prstGeom prst="roundRect">
-            <a:avLst>
-              <a:gd name="adj" fmla="val 50000"/>
-            </a:avLst>
-          </a:prstGeom>
-          <a:solidFill>
-            <a:srgbClr val="FAEEE9"/>
-          </a:solidFill>
-          <a:ln>
-            <a:noFill/>
-          </a:ln>
-          <a:effectLst/>
-        </p:spPr>
-        <p:style>
-          <a:lnRef idx="1">
-            <a:schemeClr val="accent1"/>
-          </a:lnRef>
-          <a:fillRef idx="3">
-            <a:schemeClr val="accent1"/>
-          </a:fillRef>
-          <a:effectRef idx="2">
-            <a:schemeClr val="accent1"/>
-          </a:effectRef>
-          <a:fontRef idx="minor">
-            <a:schemeClr val="lt1"/>
-          </a:fontRef>
-        </p:style>
-        <p:txBody>
-          <a:bodyPr rtlCol="0" anchor="ctr"/>
-          <a:lstStyle/>
-          <a:p>
-            <a:pPr algn="ctr"/>
-          </a:p>
-        </p:txBody>
-      </p:sp>
-      <p:sp>
-        <p:nvSpPr>
-          <p:cNvPr id="5" name="TextBox 4"/>
-          <p:cNvSpPr txBox="1"/>
-          <p:nvPr/>
-        </p:nvSpPr>
-        <p:spPr>
-          <a:xfrm>
-            <a:off x="7059168" y="589788"/>
-            <a:ext cx="1399032" cy="237744"/>
-          </a:xfrm>
-          <a:prstGeom prst="rect">
-            <a:avLst/>
-          </a:prstGeom>
-          <a:noFill/>
-        </p:spPr>
-        <p:txBody>
-          <a:bodyPr wrap="square" lIns="0" rIns="0" tIns="0" bIns="0" anchor="t">
-            <a:spAutoFit/>
-          </a:bodyPr>
-          <a:lstStyle/>
-          <a:p>
-            <a:pPr algn="ctr">
-              <a:lnSpc>
-                <a:spcPct val="125000"/>
-              </a:lnSpc>
-              <a:spcAft>
-                <a:spcPts val="0"/>
-              </a:spcAft>
-            </a:pPr>
-            <a:r>
-              <a:rPr sz="1000" b="1" i="0" spc="100">
-                <a:solidFill>
-                  <a:srgbClr val="9A4030"/>
-                </a:solidFill>
-                <a:latin typeface="Karla"/>
+                <a:latin typeface="Calibri"/>
               </a:rPr>
               <a:t>FEEDBACK</a:t>
             </a:r>
@@ -9692,11 +9164,11 @@
               </a:spcAft>
             </a:pPr>
             <a:r>
-              <a:rPr sz="3100" b="1" i="0">
+              <a:rPr sz="3100" b="0" i="0">
                 <a:solidFill>
                   <a:srgbClr val="463A36"/>
                 </a:solidFill>
-                <a:latin typeface="Libre Caslon Display"/>
+                <a:latin typeface="Georgia"/>
               </a:rPr>
               <a:t>Only three were real</a:t>
             </a:r>
@@ -9826,11 +9298,11 @@
               </a:spcAft>
             </a:pPr>
             <a:r>
-              <a:rPr sz="1400" b="1" i="0">
+              <a:rPr sz="1400" b="0" i="0">
                 <a:solidFill>
                   <a:srgbClr val="FFFDF7"/>
                 </a:solidFill>
-                <a:latin typeface="Libre Caslon Display"/>
+                <a:latin typeface="Georgia"/>
               </a:rPr>
               <a:t>2</a:t>
             </a:r>
@@ -9868,11 +9340,11 @@
               </a:spcAft>
             </a:pPr>
             <a:r>
-              <a:rPr sz="1400" b="1" i="0">
+              <a:rPr sz="1400" b="0" i="0">
                 <a:solidFill>
                   <a:srgbClr val="9A4030"/>
                 </a:solidFill>
-                <a:latin typeface="Libre Caslon Display"/>
+                <a:latin typeface="Georgia"/>
               </a:rPr>
               <a:t>“I shouldn’t have said it in front of everyone. That was embarrassing for you.”</a:t>
             </a:r>
@@ -10002,11 +9474,11 @@
               </a:spcAft>
             </a:pPr>
             <a:r>
-              <a:rPr sz="1400" b="1" i="0">
+              <a:rPr sz="1400" b="0" i="0">
                 <a:solidFill>
                   <a:srgbClr val="FFFDF7"/>
                 </a:solidFill>
-                <a:latin typeface="Libre Caslon Display"/>
+                <a:latin typeface="Georgia"/>
               </a:rPr>
               <a:t>5</a:t>
             </a:r>
@@ -10044,11 +9516,11 @@
               </a:spcAft>
             </a:pPr>
             <a:r>
-              <a:rPr sz="1400" b="1" i="0">
+              <a:rPr sz="1400" b="0" i="0">
                 <a:solidFill>
                   <a:srgbClr val="9A4030"/>
                 </a:solidFill>
-                <a:latin typeface="Libre Caslon Display"/>
+                <a:latin typeface="Georgia"/>
               </a:rPr>
               <a:t>“I was wrong, and I am not going to do it again.”</a:t>
             </a:r>
@@ -10178,11 +9650,11 @@
               </a:spcAft>
             </a:pPr>
             <a:r>
-              <a:rPr sz="1400" b="1" i="0">
+              <a:rPr sz="1400" b="0" i="0">
                 <a:solidFill>
                   <a:srgbClr val="FFFDF7"/>
                 </a:solidFill>
-                <a:latin typeface="Libre Caslon Display"/>
+                <a:latin typeface="Georgia"/>
               </a:rPr>
               <a:t>7</a:t>
             </a:r>
@@ -10220,11 +9692,11 @@
               </a:spcAft>
             </a:pPr>
             <a:r>
-              <a:rPr sz="1400" b="1" i="0">
+              <a:rPr sz="1400" b="0" i="0">
                 <a:solidFill>
                   <a:srgbClr val="9A4030"/>
                 </a:solidFill>
-                <a:latin typeface="Libre Caslon Display"/>
+                <a:latin typeface="Georgia"/>
               </a:rPr>
               <a:t>“I know saying sorry doesn’t undo it. I’ll walk in with you tomorrow.”</a:t>
             </a:r>
@@ -10266,7 +9738,7 @@
                 <a:solidFill>
                   <a:srgbClr val="7A6862"/>
                 </a:solidFill>
-                <a:latin typeface="Karla"/>
+                <a:latin typeface="Calibri"/>
               </a:rPr>
               <a:t>The other five are all doing one of three things instead.</a:t>
             </a:r>
@@ -10332,7 +9804,7 @@
                 <a:solidFill>
                   <a:srgbClr val="AD9C96"/>
                 </a:solidFill>
-                <a:latin typeface="Karla"/>
+                <a:latin typeface="Calibri"/>
               </a:rPr>
               <a:t>The Pastoral Guide</a:t>
             </a:r>
@@ -10374,7 +9846,7 @@
                 <a:solidFill>
                   <a:srgbClr val="AD9C96"/>
                 </a:solidFill>
-                <a:latin typeface="Karla"/>
+                <a:latin typeface="Calibri"/>
               </a:rPr>
               <a:t>4 / 14</a:t>
             </a:r>
@@ -10478,97 +9950,9 @@
                 <a:solidFill>
                   <a:srgbClr val="CD8878"/>
                 </a:solidFill>
-                <a:latin typeface="Karla"/>
+                <a:latin typeface="Calibri"/>
               </a:rPr>
               <a:t>FEEDBACK</a:t>
-            </a:r>
-          </a:p>
-        </p:txBody>
-      </p:sp>
-      <p:sp>
-        <p:nvSpPr>
-          <p:cNvPr id="4" name="Rounded Rectangle 3"/>
-          <p:cNvSpPr/>
-          <p:nvPr/>
-        </p:nvSpPr>
-        <p:spPr>
-          <a:xfrm>
-            <a:off x="7086600" y="530352"/>
-            <a:ext cx="1371600" cy="347472"/>
-          </a:xfrm>
-          <a:prstGeom prst="roundRect">
-            <a:avLst>
-              <a:gd name="adj" fmla="val 50000"/>
-            </a:avLst>
-          </a:prstGeom>
-          <a:solidFill>
-            <a:srgbClr val="FAEEE9"/>
-          </a:solidFill>
-          <a:ln>
-            <a:noFill/>
-          </a:ln>
-          <a:effectLst/>
-        </p:spPr>
-        <p:style>
-          <a:lnRef idx="1">
-            <a:schemeClr val="accent1"/>
-          </a:lnRef>
-          <a:fillRef idx="3">
-            <a:schemeClr val="accent1"/>
-          </a:fillRef>
-          <a:effectRef idx="2">
-            <a:schemeClr val="accent1"/>
-          </a:effectRef>
-          <a:fontRef idx="minor">
-            <a:schemeClr val="lt1"/>
-          </a:fontRef>
-        </p:style>
-        <p:txBody>
-          <a:bodyPr rtlCol="0" anchor="ctr"/>
-          <a:lstStyle/>
-          <a:p>
-            <a:pPr algn="ctr"/>
-          </a:p>
-        </p:txBody>
-      </p:sp>
-      <p:sp>
-        <p:nvSpPr>
-          <p:cNvPr id="5" name="TextBox 4"/>
-          <p:cNvSpPr txBox="1"/>
-          <p:nvPr/>
-        </p:nvSpPr>
-        <p:spPr>
-          <a:xfrm>
-            <a:off x="7086600" y="589788"/>
-            <a:ext cx="1371600" cy="237744"/>
-          </a:xfrm>
-          <a:prstGeom prst="rect">
-            <a:avLst/>
-          </a:prstGeom>
-          <a:noFill/>
-        </p:spPr>
-        <p:txBody>
-          <a:bodyPr wrap="square" lIns="0" rIns="0" tIns="0" bIns="0" anchor="t">
-            <a:spAutoFit/>
-          </a:bodyPr>
-          <a:lstStyle/>
-          <a:p>
-            <a:pPr algn="ctr">
-              <a:lnSpc>
-                <a:spcPct val="125000"/>
-              </a:lnSpc>
-              <a:spcAft>
-                <a:spcPts val="0"/>
-              </a:spcAft>
-            </a:pPr>
-            <a:r>
-              <a:rPr sz="1000" b="1" i="0" spc="100">
-                <a:solidFill>
-                  <a:srgbClr val="9A4030"/>
-                </a:solidFill>
-                <a:latin typeface="Karla"/>
-              </a:rPr>
-              <a:t>TEACH</a:t>
             </a:r>
           </a:p>
         </p:txBody>
@@ -10604,11 +9988,11 @@
               </a:spcAft>
             </a:pPr>
             <a:r>
-              <a:rPr sz="3100" b="1" i="0">
+              <a:rPr sz="3100" b="0" i="0">
                 <a:solidFill>
                   <a:srgbClr val="463A36"/>
                 </a:solidFill>
-                <a:latin typeface="Libre Caslon Display"/>
+                <a:latin typeface="Georgia"/>
               </a:rPr>
               <a:t>The three moves</a:t>
             </a:r>
@@ -10762,11 +10146,11 @@
               </a:spcAft>
             </a:pPr>
             <a:r>
-              <a:rPr sz="1300" b="1" i="0">
+              <a:rPr sz="1300" b="0" i="0">
                 <a:solidFill>
                   <a:srgbClr val="9A4030"/>
                 </a:solidFill>
-                <a:latin typeface="Libre Caslon Display"/>
+                <a:latin typeface="Georgia"/>
               </a:rPr>
               <a:t>“I’m sorry you took it that way.”</a:t>
             </a:r>
@@ -10808,7 +10192,7 @@
                 <a:solidFill>
                   <a:srgbClr val="463A36"/>
                 </a:solidFill>
-                <a:latin typeface="Karla"/>
+                <a:latin typeface="Calibri"/>
               </a:rPr>
               <a:t>Blames the person who was hurt.</a:t>
             </a:r>
@@ -10850,7 +10234,7 @@
                 <a:solidFill>
                   <a:srgbClr val="7A6862"/>
                 </a:solidFill>
-                <a:latin typeface="Karla"/>
+                <a:latin typeface="Calibri"/>
               </a:rPr>
               <a:t>The sentence is about their reaction, not your action.</a:t>
             </a:r>
@@ -11004,11 +10388,11 @@
               </a:spcAft>
             </a:pPr>
             <a:r>
-              <a:rPr sz="1300" b="1" i="0">
+              <a:rPr sz="1300" b="0" i="0">
                 <a:solidFill>
                   <a:srgbClr val="9A4030"/>
                 </a:solidFill>
-                <a:latin typeface="Libre Caslon Display"/>
+                <a:latin typeface="Georgia"/>
               </a:rPr>
               <a:t>“Mistakes were made.”</a:t>
             </a:r>
@@ -11050,7 +10434,7 @@
                 <a:solidFill>
                   <a:srgbClr val="463A36"/>
                 </a:solidFill>
-                <a:latin typeface="Karla"/>
+                <a:latin typeface="Calibri"/>
               </a:rPr>
               <a:t>Leaves out who did it.</a:t>
             </a:r>
@@ -11092,7 +10476,7 @@
                 <a:solidFill>
                   <a:srgbClr val="7A6862"/>
                 </a:solidFill>
-                <a:latin typeface="Karla"/>
+                <a:latin typeface="Calibri"/>
               </a:rPr>
               <a:t>If you cannot say who did it, you have not admitted anything.</a:t>
             </a:r>
@@ -11246,11 +10630,11 @@
               </a:spcAft>
             </a:pPr>
             <a:r>
-              <a:rPr sz="1300" b="1" i="0">
+              <a:rPr sz="1300" b="0" i="0">
                 <a:solidFill>
                   <a:srgbClr val="9A4030"/>
                 </a:solidFill>
-                <a:latin typeface="Libre Caslon Display"/>
+                <a:latin typeface="Georgia"/>
               </a:rPr>
               <a:t>“Sorry, but you started it.”</a:t>
             </a:r>
@@ -11292,7 +10676,7 @@
                 <a:solidFill>
                   <a:srgbClr val="463A36"/>
                 </a:solidFill>
-                <a:latin typeface="Karla"/>
+                <a:latin typeface="Calibri"/>
               </a:rPr>
               <a:t>Cancels itself out.</a:t>
             </a:r>
@@ -11334,7 +10718,7 @@
                 <a:solidFill>
                   <a:srgbClr val="7A6862"/>
                 </a:solidFill>
-                <a:latin typeface="Karla"/>
+                <a:latin typeface="Calibri"/>
               </a:rPr>
               <a:t>Everything after but is what you actually meant.</a:t>
             </a:r>
@@ -11400,7 +10784,7 @@
                 <a:solidFill>
                   <a:srgbClr val="AD9C96"/>
                 </a:solidFill>
-                <a:latin typeface="Karla"/>
+                <a:latin typeface="Calibri"/>
               </a:rPr>
               <a:t>The Pastoral Guide</a:t>
             </a:r>
@@ -11442,7 +10826,7 @@
                 <a:solidFill>
                   <a:srgbClr val="AD9C96"/>
                 </a:solidFill>
-                <a:latin typeface="Karla"/>
+                <a:latin typeface="Calibri"/>
               </a:rPr>
               <a:t>5 / 14</a:t>
             </a:r>
@@ -11546,97 +10930,9 @@
                 <a:solidFill>
                   <a:srgbClr val="CD8878"/>
                 </a:solidFill>
-                <a:latin typeface="Karla"/>
+                <a:latin typeface="Calibri"/>
               </a:rPr>
               <a:t>SO WHAT DOES A REAL ONE DO</a:t>
-            </a:r>
-          </a:p>
-        </p:txBody>
-      </p:sp>
-      <p:sp>
-        <p:nvSpPr>
-          <p:cNvPr id="4" name="Rounded Rectangle 3"/>
-          <p:cNvSpPr/>
-          <p:nvPr/>
-        </p:nvSpPr>
-        <p:spPr>
-          <a:xfrm>
-            <a:off x="7086600" y="530352"/>
-            <a:ext cx="1371600" cy="347472"/>
-          </a:xfrm>
-          <a:prstGeom prst="roundRect">
-            <a:avLst>
-              <a:gd name="adj" fmla="val 50000"/>
-            </a:avLst>
-          </a:prstGeom>
-          <a:solidFill>
-            <a:srgbClr val="FAEEE9"/>
-          </a:solidFill>
-          <a:ln>
-            <a:noFill/>
-          </a:ln>
-          <a:effectLst/>
-        </p:spPr>
-        <p:style>
-          <a:lnRef idx="1">
-            <a:schemeClr val="accent1"/>
-          </a:lnRef>
-          <a:fillRef idx="3">
-            <a:schemeClr val="accent1"/>
-          </a:fillRef>
-          <a:effectRef idx="2">
-            <a:schemeClr val="accent1"/>
-          </a:effectRef>
-          <a:fontRef idx="minor">
-            <a:schemeClr val="lt1"/>
-          </a:fontRef>
-        </p:style>
-        <p:txBody>
-          <a:bodyPr rtlCol="0" anchor="ctr"/>
-          <a:lstStyle/>
-          <a:p>
-            <a:pPr algn="ctr"/>
-          </a:p>
-        </p:txBody>
-      </p:sp>
-      <p:sp>
-        <p:nvSpPr>
-          <p:cNvPr id="5" name="TextBox 4"/>
-          <p:cNvSpPr txBox="1"/>
-          <p:nvPr/>
-        </p:nvSpPr>
-        <p:spPr>
-          <a:xfrm>
-            <a:off x="7086600" y="589788"/>
-            <a:ext cx="1371600" cy="237744"/>
-          </a:xfrm>
-          <a:prstGeom prst="rect">
-            <a:avLst/>
-          </a:prstGeom>
-          <a:noFill/>
-        </p:spPr>
-        <p:txBody>
-          <a:bodyPr wrap="square" lIns="0" rIns="0" tIns="0" bIns="0" anchor="t">
-            <a:spAutoFit/>
-          </a:bodyPr>
-          <a:lstStyle/>
-          <a:p>
-            <a:pPr algn="ctr">
-              <a:lnSpc>
-                <a:spcPct val="125000"/>
-              </a:lnSpc>
-              <a:spcAft>
-                <a:spcPts val="0"/>
-              </a:spcAft>
-            </a:pPr>
-            <a:r>
-              <a:rPr sz="1000" b="1" i="0" spc="100">
-                <a:solidFill>
-                  <a:srgbClr val="9A4030"/>
-                </a:solidFill>
-                <a:latin typeface="Karla"/>
-              </a:rPr>
-              <a:t>TEACH</a:t>
             </a:r>
           </a:p>
         </p:txBody>
@@ -11672,11 +10968,11 @@
               </a:spcAft>
             </a:pPr>
             <a:r>
-              <a:rPr sz="3100" b="1" i="0">
+              <a:rPr sz="3100" b="0" i="0">
                 <a:solidFill>
                   <a:srgbClr val="463A36"/>
                 </a:solidFill>
-                <a:latin typeface="Libre Caslon Display"/>
+                <a:latin typeface="Georgia"/>
               </a:rPr>
               <a:t>Four parts, in this order</a:t>
             </a:r>
@@ -11806,11 +11102,11 @@
               </a:spcAft>
             </a:pPr>
             <a:r>
-              <a:rPr sz="2000" b="1" i="0">
+              <a:rPr sz="2000" b="0" i="0">
                 <a:solidFill>
                   <a:srgbClr val="FFFDF7"/>
                 </a:solidFill>
-                <a:latin typeface="Libre Caslon Display"/>
+                <a:latin typeface="Georgia"/>
               </a:rPr>
               <a:t>1</a:t>
             </a:r>
@@ -11848,11 +11144,11 @@
               </a:spcAft>
             </a:pPr>
             <a:r>
-              <a:rPr sz="1350" b="1" i="0">
+              <a:rPr sz="1350" b="0" i="0">
                 <a:solidFill>
                   <a:srgbClr val="9A4030"/>
                 </a:solidFill>
-                <a:latin typeface="Libre Caslon Display"/>
+                <a:latin typeface="Georgia"/>
               </a:rPr>
               <a:t>Name what you did.</a:t>
             </a:r>
@@ -11894,7 +11190,7 @@
                 <a:solidFill>
                   <a:srgbClr val="7A6862"/>
                 </a:solidFill>
-                <a:latin typeface="Karla"/>
+                <a:latin typeface="Calibri"/>
               </a:rPr>
               <a:t>Not what happened: what you did.</a:t>
             </a:r>
@@ -12024,11 +11320,11 @@
               </a:spcAft>
             </a:pPr>
             <a:r>
-              <a:rPr sz="2000" b="1" i="0">
+              <a:rPr sz="2000" b="0" i="0">
                 <a:solidFill>
                   <a:srgbClr val="FFFDF7"/>
                 </a:solidFill>
-                <a:latin typeface="Libre Caslon Display"/>
+                <a:latin typeface="Georgia"/>
               </a:rPr>
               <a:t>2</a:t>
             </a:r>
@@ -12066,11 +11362,11 @@
               </a:spcAft>
             </a:pPr>
             <a:r>
-              <a:rPr sz="1350" b="1" i="0">
+              <a:rPr sz="1350" b="0" i="0">
                 <a:solidFill>
                   <a:srgbClr val="9A4030"/>
                 </a:solidFill>
-                <a:latin typeface="Libre Caslon Display"/>
+                <a:latin typeface="Georgia"/>
               </a:rPr>
               <a:t>Say why it landed.</a:t>
             </a:r>
@@ -12112,7 +11408,7 @@
                 <a:solidFill>
                   <a:srgbClr val="7A6862"/>
                 </a:solidFill>
-                <a:latin typeface="Karla"/>
+                <a:latin typeface="Calibri"/>
               </a:rPr>
               <a:t>Show you understand the effect on them.</a:t>
             </a:r>
@@ -12242,11 +11538,11 @@
               </a:spcAft>
             </a:pPr>
             <a:r>
-              <a:rPr sz="2000" b="1" i="0">
+              <a:rPr sz="2000" b="0" i="0">
                 <a:solidFill>
                   <a:srgbClr val="FFFDF7"/>
                 </a:solidFill>
-                <a:latin typeface="Libre Caslon Display"/>
+                <a:latin typeface="Georgia"/>
               </a:rPr>
               <a:t>3</a:t>
             </a:r>
@@ -12284,11 +11580,11 @@
               </a:spcAft>
             </a:pPr>
             <a:r>
-              <a:rPr sz="1350" b="1" i="0">
+              <a:rPr sz="1350" b="0" i="0">
                 <a:solidFill>
                   <a:srgbClr val="9A4030"/>
                 </a:solidFill>
-                <a:latin typeface="Libre Caslon Display"/>
+                <a:latin typeface="Georgia"/>
               </a:rPr>
               <a:t>Stop.</a:t>
             </a:r>
@@ -12330,7 +11626,7 @@
                 <a:solidFill>
                   <a:srgbClr val="7A6862"/>
                 </a:solidFill>
-                <a:latin typeface="Karla"/>
+                <a:latin typeface="Calibri"/>
               </a:rPr>
               <a:t>No “but”, no explaining, no asking to be let off.</a:t>
             </a:r>
@@ -12460,11 +11756,11 @@
               </a:spcAft>
             </a:pPr>
             <a:r>
-              <a:rPr sz="2000" b="1" i="0">
+              <a:rPr sz="2000" b="0" i="0">
                 <a:solidFill>
                   <a:srgbClr val="FFFDF7"/>
                 </a:solidFill>
-                <a:latin typeface="Libre Caslon Display"/>
+                <a:latin typeface="Georgia"/>
               </a:rPr>
               <a:t>4</a:t>
             </a:r>
@@ -12502,11 +11798,11 @@
               </a:spcAft>
             </a:pPr>
             <a:r>
-              <a:rPr sz="1350" b="1" i="0">
+              <a:rPr sz="1350" b="0" i="0">
                 <a:solidFill>
                   <a:srgbClr val="9A4030"/>
                 </a:solidFill>
-                <a:latin typeface="Libre Caslon Display"/>
+                <a:latin typeface="Georgia"/>
               </a:rPr>
               <a:t>Say what changes.</a:t>
             </a:r>
@@ -12548,7 +11844,7 @@
                 <a:solidFill>
                   <a:srgbClr val="7A6862"/>
                 </a:solidFill>
-                <a:latin typeface="Karla"/>
+                <a:latin typeface="Calibri"/>
               </a:rPr>
               <a:t>One specific thing you will do differently.</a:t>
             </a:r>
@@ -12614,7 +11910,7 @@
                 <a:solidFill>
                   <a:srgbClr val="AD9C96"/>
                 </a:solidFill>
-                <a:latin typeface="Karla"/>
+                <a:latin typeface="Calibri"/>
               </a:rPr>
               <a:t>The Pastoral Guide</a:t>
             </a:r>
@@ -12656,7 +11952,7 @@
                 <a:solidFill>
                   <a:srgbClr val="AD9C96"/>
                 </a:solidFill>
-                <a:latin typeface="Karla"/>
+                <a:latin typeface="Calibri"/>
               </a:rPr>
               <a:t>6 / 14</a:t>
             </a:r>
@@ -12760,97 +12056,9 @@
                 <a:solidFill>
                   <a:srgbClr val="CD8878"/>
                 </a:solidFill>
-                <a:latin typeface="Karla"/>
+                <a:latin typeface="Calibri"/>
               </a:rPr>
               <a:t>WATCH ONE GET FIXED</a:t>
-            </a:r>
-          </a:p>
-        </p:txBody>
-      </p:sp>
-      <p:sp>
-        <p:nvSpPr>
-          <p:cNvPr id="4" name="Rounded Rectangle 3"/>
-          <p:cNvSpPr/>
-          <p:nvPr/>
-        </p:nvSpPr>
-        <p:spPr>
-          <a:xfrm>
-            <a:off x="7086600" y="530352"/>
-            <a:ext cx="1371600" cy="347472"/>
-          </a:xfrm>
-          <a:prstGeom prst="roundRect">
-            <a:avLst>
-              <a:gd name="adj" fmla="val 50000"/>
-            </a:avLst>
-          </a:prstGeom>
-          <a:solidFill>
-            <a:srgbClr val="FAEEE9"/>
-          </a:solidFill>
-          <a:ln>
-            <a:noFill/>
-          </a:ln>
-          <a:effectLst/>
-        </p:spPr>
-        <p:style>
-          <a:lnRef idx="1">
-            <a:schemeClr val="accent1"/>
-          </a:lnRef>
-          <a:fillRef idx="3">
-            <a:schemeClr val="accent1"/>
-          </a:fillRef>
-          <a:effectRef idx="2">
-            <a:schemeClr val="accent1"/>
-          </a:effectRef>
-          <a:fontRef idx="minor">
-            <a:schemeClr val="lt1"/>
-          </a:fontRef>
-        </p:style>
-        <p:txBody>
-          <a:bodyPr rtlCol="0" anchor="ctr"/>
-          <a:lstStyle/>
-          <a:p>
-            <a:pPr algn="ctr"/>
-          </a:p>
-        </p:txBody>
-      </p:sp>
-      <p:sp>
-        <p:nvSpPr>
-          <p:cNvPr id="5" name="TextBox 4"/>
-          <p:cNvSpPr txBox="1"/>
-          <p:nvPr/>
-        </p:nvSpPr>
-        <p:spPr>
-          <a:xfrm>
-            <a:off x="7086600" y="589788"/>
-            <a:ext cx="1371600" cy="237744"/>
-          </a:xfrm>
-          <a:prstGeom prst="rect">
-            <a:avLst/>
-          </a:prstGeom>
-          <a:noFill/>
-        </p:spPr>
-        <p:txBody>
-          <a:bodyPr wrap="square" lIns="0" rIns="0" tIns="0" bIns="0" anchor="t">
-            <a:spAutoFit/>
-          </a:bodyPr>
-          <a:lstStyle/>
-          <a:p>
-            <a:pPr algn="ctr">
-              <a:lnSpc>
-                <a:spcPct val="125000"/>
-              </a:lnSpc>
-              <a:spcAft>
-                <a:spcPts val="0"/>
-              </a:spcAft>
-            </a:pPr>
-            <a:r>
-              <a:rPr sz="1000" b="1" i="0" spc="100">
-                <a:solidFill>
-                  <a:srgbClr val="9A4030"/>
-                </a:solidFill>
-                <a:latin typeface="Karla"/>
-              </a:rPr>
-              <a:t>MODEL</a:t>
             </a:r>
           </a:p>
         </p:txBody>
@@ -12886,11 +12094,11 @@
               </a:spcAft>
             </a:pPr>
             <a:r>
-              <a:rPr sz="3100" b="1" i="0">
+              <a:rPr sz="3100" b="0" i="0">
                 <a:solidFill>
                   <a:srgbClr val="463A36"/>
                 </a:solidFill>
-                <a:latin typeface="Libre Caslon Display"/>
+                <a:latin typeface="Georgia"/>
               </a:rPr>
               <a:t>Before and after</a:t>
             </a:r>
@@ -12980,7 +12188,7 @@
                 <a:solidFill>
                   <a:srgbClr val="CD8878"/>
                 </a:solidFill>
-                <a:latin typeface="Karla"/>
+                <a:latin typeface="Calibri"/>
               </a:rPr>
               <a:t>BEFORE</a:t>
             </a:r>
@@ -13022,7 +12230,7 @@
                 <a:solidFill>
                   <a:srgbClr val="7A6862"/>
                 </a:solidFill>
-                <a:latin typeface="Karla"/>
+                <a:latin typeface="Calibri"/>
               </a:rPr>
               <a:t>“Sorry if you got upset about the group chat thing, but you know what you’re like.”</a:t>
             </a:r>
@@ -13112,7 +12320,7 @@
                 <a:solidFill>
                   <a:srgbClr val="9A4030"/>
                 </a:solidFill>
-                <a:latin typeface="Karla"/>
+                <a:latin typeface="Calibri"/>
               </a:rPr>
               <a:t>AFTER</a:t>
             </a:r>
@@ -13154,7 +12362,7 @@
                 <a:solidFill>
                   <a:srgbClr val="463A36"/>
                 </a:solidFill>
-                <a:latin typeface="Karla"/>
+                <a:latin typeface="Calibri"/>
               </a:rPr>
               <a:t>“I left you out of the group chat and then laughed when you asked about it. That was humiliating. I am not doing it again, and I will say so to the others.”</a:t>
             </a:r>
@@ -13196,7 +12404,7 @@
                 <a:solidFill>
                   <a:srgbClr val="9A4030"/>
                 </a:solidFill>
-                <a:latin typeface="Karla"/>
+                <a:latin typeface="Calibri"/>
               </a:rPr>
               <a:t>Point at each of the four parts on the right, in order.</a:t>
             </a:r>
@@ -13262,7 +12470,7 @@
                 <a:solidFill>
                   <a:srgbClr val="AD9C96"/>
                 </a:solidFill>
-                <a:latin typeface="Karla"/>
+                <a:latin typeface="Calibri"/>
               </a:rPr>
               <a:t>The Pastoral Guide</a:t>
             </a:r>
@@ -13304,7 +12512,7 @@
                 <a:solidFill>
                   <a:srgbClr val="AD9C96"/>
                 </a:solidFill>
-                <a:latin typeface="Karla"/>
+                <a:latin typeface="Calibri"/>
               </a:rPr>
               <a:t>7 / 14</a:t>
             </a:r>
@@ -13408,97 +12616,9 @@
                 <a:solidFill>
                   <a:srgbClr val="CD8878"/>
                 </a:solidFill>
-                <a:latin typeface="Karla"/>
+                <a:latin typeface="Calibri"/>
               </a:rPr>
               <a:t>ALL TOGETHER</a:t>
-            </a:r>
-          </a:p>
-        </p:txBody>
-      </p:sp>
-      <p:sp>
-        <p:nvSpPr>
-          <p:cNvPr id="4" name="Rounded Rectangle 3"/>
-          <p:cNvSpPr/>
-          <p:nvPr/>
-        </p:nvSpPr>
-        <p:spPr>
-          <a:xfrm>
-            <a:off x="7050024" y="530352"/>
-            <a:ext cx="1408176" cy="347472"/>
-          </a:xfrm>
-          <a:prstGeom prst="roundRect">
-            <a:avLst>
-              <a:gd name="adj" fmla="val 50000"/>
-            </a:avLst>
-          </a:prstGeom>
-          <a:solidFill>
-            <a:srgbClr val="FAEEE9"/>
-          </a:solidFill>
-          <a:ln>
-            <a:noFill/>
-          </a:ln>
-          <a:effectLst/>
-        </p:spPr>
-        <p:style>
-          <a:lnRef idx="1">
-            <a:schemeClr val="accent1"/>
-          </a:lnRef>
-          <a:fillRef idx="3">
-            <a:schemeClr val="accent1"/>
-          </a:fillRef>
-          <a:effectRef idx="2">
-            <a:schemeClr val="accent1"/>
-          </a:effectRef>
-          <a:fontRef idx="minor">
-            <a:schemeClr val="lt1"/>
-          </a:fontRef>
-        </p:style>
-        <p:txBody>
-          <a:bodyPr rtlCol="0" anchor="ctr"/>
-          <a:lstStyle/>
-          <a:p>
-            <a:pPr algn="ctr"/>
-          </a:p>
-        </p:txBody>
-      </p:sp>
-      <p:sp>
-        <p:nvSpPr>
-          <p:cNvPr id="5" name="TextBox 4"/>
-          <p:cNvSpPr txBox="1"/>
-          <p:nvPr/>
-        </p:nvSpPr>
-        <p:spPr>
-          <a:xfrm>
-            <a:off x="7050024" y="589788"/>
-            <a:ext cx="1408176" cy="237744"/>
-          </a:xfrm>
-          <a:prstGeom prst="rect">
-            <a:avLst/>
-          </a:prstGeom>
-          <a:noFill/>
-        </p:spPr>
-        <p:txBody>
-          <a:bodyPr wrap="square" lIns="0" rIns="0" tIns="0" bIns="0" anchor="t">
-            <a:spAutoFit/>
-          </a:bodyPr>
-          <a:lstStyle/>
-          <a:p>
-            <a:pPr algn="ctr">
-              <a:lnSpc>
-                <a:spcPct val="125000"/>
-              </a:lnSpc>
-              <a:spcAft>
-                <a:spcPts val="0"/>
-              </a:spcAft>
-            </a:pPr>
-            <a:r>
-              <a:rPr sz="1000" b="1" i="0" spc="100">
-                <a:solidFill>
-                  <a:srgbClr val="9A4030"/>
-                </a:solidFill>
-                <a:latin typeface="Karla"/>
-              </a:rPr>
-              <a:t>TOGETHER</a:t>
             </a:r>
           </a:p>
         </p:txBody>
@@ -13534,11 +12654,11 @@
               </a:spcAft>
             </a:pPr>
             <a:r>
-              <a:rPr sz="3100" b="1" i="0">
+              <a:rPr sz="3100" b="0" i="0">
                 <a:solidFill>
                   <a:srgbClr val="463A36"/>
                 </a:solidFill>
-                <a:latin typeface="Libre Caslon Display"/>
+                <a:latin typeface="Georgia"/>
               </a:rPr>
               <a:t>Now fix this one out loud</a:t>
             </a:r>
@@ -13628,7 +12748,7 @@
                 <a:solidFill>
                   <a:srgbClr val="463A36"/>
                 </a:solidFill>
-                <a:latin typeface="Karla"/>
+                <a:latin typeface="Calibri"/>
               </a:rPr>
               <a:t>You promised to cover your friend’s shift, then did not turn up. They got in trouble for it.</a:t>
             </a:r>
@@ -13714,11 +12834,11 @@
               </a:spcAft>
             </a:pPr>
             <a:r>
-              <a:rPr sz="1500" b="1" i="0">
+              <a:rPr sz="1500" b="0" i="0">
                 <a:solidFill>
                   <a:srgbClr val="9A4030"/>
                 </a:solidFill>
-                <a:latin typeface="Libre Caslon Display"/>
+                <a:latin typeface="Georgia"/>
               </a:rPr>
               <a:t>“Sorry about the shift thing, I completely forgot, I’ve had so much on. But you know I’d normally do it.”</a:t>
             </a:r>
@@ -13760,7 +12880,7 @@
                 <a:solidFill>
                   <a:srgbClr val="7A6862"/>
                 </a:solidFill>
-                <a:latin typeface="Karla"/>
+                <a:latin typeface="Calibri"/>
               </a:rPr>
               <a:t>Which parts are missing? Rebuild it one part at a time and write the finished version on the board.</a:t>
             </a:r>
@@ -13826,7 +12946,7 @@
                 <a:solidFill>
                   <a:srgbClr val="AD9C96"/>
                 </a:solidFill>
-                <a:latin typeface="Karla"/>
+                <a:latin typeface="Calibri"/>
               </a:rPr>
               <a:t>The Pastoral Guide</a:t>
             </a:r>
@@ -13868,7 +12988,7 @@
                 <a:solidFill>
                   <a:srgbClr val="AD9C96"/>
                 </a:solidFill>
-                <a:latin typeface="Karla"/>
+                <a:latin typeface="Calibri"/>
               </a:rPr>
               <a:t>8 / 14</a:t>
             </a:r>
@@ -13972,97 +13092,9 @@
                 <a:solidFill>
                   <a:srgbClr val="EBC4B6"/>
                 </a:solidFill>
-                <a:latin typeface="Karla"/>
+                <a:latin typeface="Calibri"/>
               </a:rPr>
               <a:t>MAIN ACTIVITY</a:t>
-            </a:r>
-          </a:p>
-        </p:txBody>
-      </p:sp>
-      <p:sp>
-        <p:nvSpPr>
-          <p:cNvPr id="4" name="Rounded Rectangle 3"/>
-          <p:cNvSpPr/>
-          <p:nvPr/>
-        </p:nvSpPr>
-        <p:spPr>
-          <a:xfrm>
-            <a:off x="7086600" y="530352"/>
-            <a:ext cx="1371600" cy="347472"/>
-          </a:xfrm>
-          <a:prstGeom prst="roundRect">
-            <a:avLst>
-              <a:gd name="adj" fmla="val 50000"/>
-            </a:avLst>
-          </a:prstGeom>
-          <a:solidFill>
-            <a:srgbClr val="FFFDF7"/>
-          </a:solidFill>
-          <a:ln>
-            <a:noFill/>
-          </a:ln>
-          <a:effectLst/>
-        </p:spPr>
-        <p:style>
-          <a:lnRef idx="1">
-            <a:schemeClr val="accent1"/>
-          </a:lnRef>
-          <a:fillRef idx="3">
-            <a:schemeClr val="accent1"/>
-          </a:fillRef>
-          <a:effectRef idx="2">
-            <a:schemeClr val="accent1"/>
-          </a:effectRef>
-          <a:fontRef idx="minor">
-            <a:schemeClr val="lt1"/>
-          </a:fontRef>
-        </p:style>
-        <p:txBody>
-          <a:bodyPr rtlCol="0" anchor="ctr"/>
-          <a:lstStyle/>
-          <a:p>
-            <a:pPr algn="ctr"/>
-          </a:p>
-        </p:txBody>
-      </p:sp>
-      <p:sp>
-        <p:nvSpPr>
-          <p:cNvPr id="5" name="TextBox 4"/>
-          <p:cNvSpPr txBox="1"/>
-          <p:nvPr/>
-        </p:nvSpPr>
-        <p:spPr>
-          <a:xfrm>
-            <a:off x="7086600" y="589788"/>
-            <a:ext cx="1371600" cy="237744"/>
-          </a:xfrm>
-          <a:prstGeom prst="rect">
-            <a:avLst/>
-          </a:prstGeom>
-          <a:noFill/>
-        </p:spPr>
-        <p:txBody>
-          <a:bodyPr wrap="square" lIns="0" rIns="0" tIns="0" bIns="0" anchor="t">
-            <a:spAutoFit/>
-          </a:bodyPr>
-          <a:lstStyle/>
-          <a:p>
-            <a:pPr algn="ctr">
-              <a:lnSpc>
-                <a:spcPct val="125000"/>
-              </a:lnSpc>
-              <a:spcAft>
-                <a:spcPts val="0"/>
-              </a:spcAft>
-            </a:pPr>
-            <a:r>
-              <a:rPr sz="1000" b="1" i="0" spc="100">
-                <a:solidFill>
-                  <a:srgbClr val="9A4030"/>
-                </a:solidFill>
-                <a:latin typeface="Karla"/>
-              </a:rPr>
-              <a:t>IN PAIRS</a:t>
             </a:r>
           </a:p>
         </p:txBody>
@@ -14098,11 +13130,11 @@
               </a:spcAft>
             </a:pPr>
             <a:r>
-              <a:rPr sz="3400" b="1" i="0">
+              <a:rPr sz="3400" b="0" i="0">
                 <a:solidFill>
                   <a:srgbClr val="FFFDF7"/>
                 </a:solidFill>
-                <a:latin typeface="Libre Caslon Display"/>
+                <a:latin typeface="Georgia"/>
               </a:rPr>
               <a:t>Fix a real one, in pairs</a:t>
             </a:r>
@@ -14232,11 +13264,11 @@
               </a:spcAft>
             </a:pPr>
             <a:r>
-              <a:rPr sz="1300" b="1" i="0">
+              <a:rPr sz="1300" b="0" i="0">
                 <a:solidFill>
                   <a:srgbClr val="FFFDF7"/>
                 </a:solidFill>
-                <a:latin typeface="Libre Caslon Display"/>
+                <a:latin typeface="Georgia"/>
               </a:rPr>
               <a:t>1</a:t>
             </a:r>
@@ -14278,7 +13310,7 @@
                 <a:solidFill>
                   <a:srgbClr val="9A4030"/>
                 </a:solidFill>
-                <a:latin typeface="Karla"/>
+                <a:latin typeface="Calibri"/>
               </a:rPr>
               <a:t>Take one scenario card between two.</a:t>
             </a:r>
@@ -14408,11 +13440,11 @@
               </a:spcAft>
             </a:pPr>
             <a:r>
-              <a:rPr sz="1300" b="1" i="0">
+              <a:rPr sz="1300" b="0" i="0">
                 <a:solidFill>
                   <a:srgbClr val="FFFDF7"/>
                 </a:solidFill>
-                <a:latin typeface="Libre Caslon Display"/>
+                <a:latin typeface="Georgia"/>
               </a:rPr>
               <a:t>2</a:t>
             </a:r>
@@ -14454,7 +13486,7 @@
                 <a:solidFill>
                   <a:srgbClr val="9A4030"/>
                 </a:solidFill>
-                <a:latin typeface="Karla"/>
+                <a:latin typeface="Calibri"/>
               </a:rPr>
               <a:t>Rewrite the apology on the sheet. All four parts, in order.</a:t>
             </a:r>
@@ -14584,11 +13616,11 @@
               </a:spcAft>
             </a:pPr>
             <a:r>
-              <a:rPr sz="1300" b="1" i="0">
+              <a:rPr sz="1300" b="0" i="0">
                 <a:solidFill>
                   <a:srgbClr val="FFFDF7"/>
                 </a:solidFill>
-                <a:latin typeface="Libre Caslon Display"/>
+                <a:latin typeface="Georgia"/>
               </a:rPr>
               <a:t>3</a:t>
             </a:r>
@@ -14630,7 +13662,7 @@
                 <a:solidFill>
                   <a:srgbClr val="9A4030"/>
                 </a:solidFill>
-                <a:latin typeface="Karla"/>
+                <a:latin typeface="Calibri"/>
               </a:rPr>
               <a:t>No names on it. Another pair is going to mark it.</a:t>
             </a:r>
@@ -14696,7 +13728,7 @@
                 <a:solidFill>
                   <a:srgbClr val="EBC4B6"/>
                 </a:solidFill>
-                <a:latin typeface="Karla"/>
+                <a:latin typeface="Calibri"/>
               </a:rPr>
               <a:t>The Pastoral Guide</a:t>
             </a:r>
@@ -14738,7 +13770,7 @@
                 <a:solidFill>
                   <a:srgbClr val="EBC4B6"/>
                 </a:solidFill>
-                <a:latin typeface="Karla"/>
+                <a:latin typeface="Calibri"/>
               </a:rPr>
               <a:t>9 / 14</a:t>
             </a:r>

--- a/tutor-time/the-apology/downloads/The_Apology.pptx
+++ b/tutor-time/the-apology/downloads/The_Apology.pptx
@@ -3292,7 +3292,7 @@
                 </a:solidFill>
                 <a:latin typeface="Calibri"/>
               </a:rPr>
-              <a:t>Everyone says it. Almost nobody is taught how.</a:t>
+              <a:t>How to say sorry properly.</a:t>
             </a:r>
           </a:p>
         </p:txBody>
